--- a/lightning-lesson-v3/How_to_Tell_If_Your_Career_Is_Stalling_Lightning_Lesson_v3.1_FINAL.pptx
+++ b/lightning-lesson-v3/How_to_Tell_If_Your_Career_Is_Stalling_Lightning_Lesson_v3.1_FINAL.pptx
@@ -968,58 +968,87 @@
           <a:lstStyle/>
           <a:p>
             <a:r>
-              <a:rPr sz="1100">
-                <a:latin typeface="Arial"/>
-              </a:rPr>
-              <a:t>TIMING: 32:30-34:00</a:t>
-            </a:r>
-          </a:p>
-          <a:p>
-            <a:r>
-              <a:rPr sz="1100">
-                <a:latin typeface="Arial"/>
-              </a:rPr>
+              <a:t>TIMING: 32:30-45:00 — this slide stays on screen for both the workshop introduction (32:30-34:00) and the full Q&amp;A block (34:00-45:00). Do not advance to a separate Q&amp;A slide.</a:t>
+            </a:r>
+          </a:p>
+          <a:p>
+            <a:r>
+              <a:t/>
+            </a:r>
+          </a:p>
+          <a:p>
+            <a:r>
+              <a:t>WORKSHOP INTRODUCTION (32:30-34:00)</a:t>
+            </a:r>
+          </a:p>
+          <a:p>
+            <a:r>
               <a:t>WHAT TO SAY: If today helped you recognize a pattern, the full Position Read is where that pattern gets examined with evidence. It is a two-hour live workshop, including Q&amp;A. Point to the registration CTA once, clearly.</a:t>
             </a:r>
           </a:p>
           <a:p>
             <a:r>
-              <a:rPr sz="1100">
-                <a:latin typeface="Arial"/>
-              </a:rPr>
               <a:t>WHAT NOT TO SAY: Do not run a hard close. Do not imply the free lesson was incomplete on purpose — it was complete for recognition.</a:t>
             </a:r>
           </a:p>
           <a:p>
             <a:r>
-              <a:rPr sz="1100">
-                <a:latin typeface="Arial"/>
-              </a:rPr>
-              <a:t>PARTICIPANT ACTION: None yet — registration happens after the session or during the break in Q&amp;A.</a:t>
-            </a:r>
-          </a:p>
-          <a:p>
-            <a:r>
-              <a:rPr sz="1100">
-                <a:latin typeface="Arial"/>
-              </a:rPr>
               <a:t>LIKELY MISUNDERSTANDING: Someone may confuse the $249 launch price with a temporary discount. It is the public launch price for the first two paid deliveries, not a founding discount — correct this if it comes up.</a:t>
             </a:r>
           </a:p>
           <a:p>
             <a:r>
-              <a:rPr sz="1100">
-                <a:latin typeface="Arial"/>
-              </a:rPr>
               <a:t>ACTION BEFORE DELIVERY: Replace the URL and QR placeholders with the confirmed Maven registration link and the confirmed Substack link before this deck goes live.</a:t>
             </a:r>
           </a:p>
           <a:p>
             <a:r>
-              <a:rPr sz="1100">
-                <a:latin typeface="Arial"/>
-              </a:rPr>
-              <a:t>TRANSITION LINE: Keep this slide up. Let's open it up for questions.</a:t>
+              <a:t/>
+            </a:r>
+          </a:p>
+          <a:p>
+            <a:r>
+              <a:t>Q&amp;A (34:00-45:00) — STAY ON THIS SLIDE</a:t>
+            </a:r>
+          </a:p>
+          <a:p>
+            <a:r>
+              <a:t>Keep answers short. Answer the principle, not the person's career decision.</a:t>
+            </a:r>
+          </a:p>
+          <a:p>
+            <a:r>
+              <a:t>GOOD Q&amp;A QUESTIONS: How do I tell the difference between performance and formation? What does portability mean? What kind of evidence counts?</a:t>
+            </a:r>
+          </a:p>
+          <a:p>
+            <a:r>
+              <a:t>QUESTIONS TO REDIRECT: Should I leave? What state am I in? What should I do about my manager? Can you score my situation?</a:t>
+            </a:r>
+          </a:p>
+          <a:p>
+            <a:r>
+              <a:t>Q&amp;A BOUNDARY (say this): "I can help you clarify what the pattern suggests examining. I cannot make the employment decision for you."</a:t>
+            </a:r>
+          </a:p>
+          <a:p>
+            <a:r>
+              <a:t>IF ASKED WHY NO ONE IS SCORED HERE: "Questions about the ideas are welcome. Individual situations will not be scored or diagnosed in this room."</a:t>
+            </a:r>
+          </a:p>
+          <a:p>
+            <a:r>
+              <a:t>WHAT NOT TO SAY: Do not score anyone's situation live. Do not name a Career State for anyone. Do not tell anyone to stay or leave.</a:t>
+            </a:r>
+          </a:p>
+          <a:p>
+            <a:r>
+              <a:t>FACILITATOR REFERENCE: A hidden slide immediately after this one (not shown in the live sequence) holds this same Q&amp;A guidance in card form, in case you prefer glancing at Slide Sorter / Presenter view instead of these notes.</a:t>
+            </a:r>
+          </a:p>
+          <a:p>
+            <a:r>
+              <a:t>CLOSE: Thank the room. The registration link and QR code are already on screen — no need to switch slides.</a:t>
             </a:r>
           </a:p>
         </p:txBody>
@@ -1089,66 +1118,42 @@
           <a:lstStyle/>
           <a:p>
             <a:r>
-              <a:rPr sz="1100">
-                <a:latin typeface="Arial"/>
-              </a:rPr>
-              <a:t>TIMING: 34:00-45:00</a:t>
-            </a:r>
-          </a:p>
-          <a:p>
-            <a:r>
-              <a:rPr sz="1100">
-                <a:latin typeface="Arial"/>
-              </a:rPr>
-              <a:t>WHAT TO SAY: Keep answers short. Answer the principle, not the person's career decision.</a:t>
-            </a:r>
-          </a:p>
-          <a:p>
-            <a:r>
-              <a:rPr sz="1100">
-                <a:latin typeface="Arial"/>
-              </a:rPr>
+              <a:t>THIS SLIDE IS HIDDEN — it does not appear during normal Slide Show playback (View &gt; Hide Slide is set). It is kept only as a facilitator-quick-reference card.</a:t>
+            </a:r>
+          </a:p>
+          <a:p>
+            <a:r>
+              <a:t/>
+            </a:r>
+          </a:p>
+          <a:p>
+            <a:r>
+              <a:t>Live Q&amp;A now happens on slide 13 (Invitation), which stays on screen from 32:30 through 45:00. The guidance below is duplicated there in note form; use whichever view is easier to glance at.</a:t>
+            </a:r>
+          </a:p>
+          <a:p>
+            <a:r>
+              <a:t/>
+            </a:r>
+          </a:p>
+          <a:p>
+            <a:r>
+              <a:t>GOOD Q&amp;A QUESTIONS: How do I tell the difference between performance and formation? What does portability mean? What kind of evidence counts?</a:t>
+            </a:r>
+          </a:p>
+          <a:p>
+            <a:r>
+              <a:t>QUESTIONS TO REDIRECT: Should I leave? What state am I in? What should I do about my manager? Can you score my situation?</a:t>
+            </a:r>
+          </a:p>
+          <a:p>
+            <a:r>
               <a:t>BOUNDARY LINE: "I can help you clarify what the pattern suggests examining. I cannot make the employment decision for you."</a:t>
             </a:r>
           </a:p>
           <a:p>
             <a:r>
-              <a:rPr sz="1100">
-                <a:latin typeface="Arial"/>
-              </a:rPr>
-              <a:t>WHAT NOT TO SAY: Do not score anyone's situation live. Do not name a Career State for anyone. Do not tell anyone to stay or leave.</a:t>
-            </a:r>
-          </a:p>
-          <a:p>
-            <a:r>
-              <a:rPr sz="1100">
-                <a:latin typeface="Arial"/>
-              </a:rPr>
-              <a:t>PARTICIPANT ACTION: Asks questions via chat or voice.</a:t>
-            </a:r>
-          </a:p>
-          <a:p>
-            <a:r>
-              <a:rPr sz="1100">
-                <a:latin typeface="Arial"/>
-              </a:rPr>
-              <a:t>LIKELY MISUNDERSTANDING: A participant may push for a personal read disguised as a general question. Use the boundary line and move to the next question.</a:t>
-            </a:r>
-          </a:p>
-          <a:p>
-            <a:r>
-              <a:rPr sz="1100">
-                <a:latin typeface="Arial"/>
-              </a:rPr>
-              <a:t>FACILITATOR NOTE: Keep the registration strip at the bottom of this slide visible for the full Q&amp;A block — do not switch away from this slide.</a:t>
-            </a:r>
-          </a:p>
-          <a:p>
-            <a:r>
-              <a:rPr sz="1100">
-                <a:latin typeface="Arial"/>
-              </a:rPr>
-              <a:t>CLOSE: Thank the room. Remind them the registration link is live in the strip below and in the chat.</a:t>
+              <a:t>DO NOT unhide this slide and advance to it during a live session — the registration and pricing on slide 13 must stay visible for the whole Q&amp;A block.</a:t>
             </a:r>
           </a:p>
         </p:txBody>
@@ -5795,7 +5800,7 @@
                 </a:solidFill>
                 <a:latin typeface="Arial"/>
               </a:rPr>
-              <a:t>CAREER STALL CHECK  ·  23:00–28:00</a:t>
+              <a:t>CAREER STALL CHECK</a:t>
             </a:r>
           </a:p>
         </p:txBody>
@@ -6660,7 +6665,7 @@
                 </a:solidFill>
                 <a:latin typeface="Arial"/>
               </a:rPr>
-              <a:t>INTERPRET WITHOUT DIAGNOSING  ·  28:00–31:00</a:t>
+              <a:t>INTERPRET WITHOUT DIAGNOSING</a:t>
             </a:r>
           </a:p>
         </p:txBody>
@@ -7056,7 +7061,7 @@
                 </a:solidFill>
                 <a:latin typeface="Arial"/>
               </a:rPr>
-              <a:t>THIS WAS ONE PIECE  ·  31:00–32:30</a:t>
+              <a:t>THIS WAS ONE PIECE</a:t>
             </a:r>
           </a:p>
         </p:txBody>
@@ -7688,7 +7693,7 @@
                 </a:solidFill>
                 <a:latin typeface="Arial"/>
               </a:rPr>
-              <a:t>INVITATION  ·  32:30–34:00</a:t>
+              <a:t>INVITATION</a:t>
             </a:r>
           </a:p>
         </p:txBody>
@@ -8323,7 +8328,7 @@
 </file>
 
 <file path=ppt/slides/slide14.xml><?xml version="1.0" encoding="utf-8"?>
-<p:sld xmlns:a="http://schemas.openxmlformats.org/drawingml/2006/main" xmlns:p="http://schemas.openxmlformats.org/presentationml/2006/main" xmlns:r="http://schemas.openxmlformats.org/officeDocument/2006/relationships">
+<p:sld xmlns:a="http://schemas.openxmlformats.org/drawingml/2006/main" xmlns:p="http://schemas.openxmlformats.org/presentationml/2006/main" xmlns:r="http://schemas.openxmlformats.org/officeDocument/2006/relationships" show="0">
   <p:cSld>
     <p:bg>
       <p:bgPr>
@@ -8374,7 +8379,7 @@
                 </a:solidFill>
                 <a:latin typeface="Arial"/>
               </a:rPr>
-              <a:t>Q&amp;A  ·  34:00–45:00</a:t>
+              <a:t>Q&amp;A</a:t>
             </a:r>
           </a:p>
         </p:txBody>
@@ -8452,7 +8457,7 @@
                 </a:solidFill>
                 <a:latin typeface="Arial"/>
               </a:rPr>
-              <a:t>Questions about the ideas are welcome. Personal readings belong in the full workshop.</a:t>
+              <a:t>Questions about the ideas are welcome. Individual situations will not be scored or diagnosed in this room.</a:t>
             </a:r>
           </a:p>
         </p:txBody>
@@ -10961,7 +10966,7 @@
                 </a:solidFill>
                 <a:latin typeface="Arial"/>
               </a:rPr>
-              <a:t>Three signs examined against evidence from your last 90 days.</a:t>
+              <a:t>A Career Stall Check grounded in one example from your last 90 days.</a:t>
             </a:r>
           </a:p>
         </p:txBody>
@@ -11304,7 +11309,7 @@
                 </a:solidFill>
                 <a:latin typeface="Georgia"/>
               </a:rPr>
-              <a:t>Performance was never the question I should have been asking.</a:t>
+              <a:t>Performance was not the only question I should have been asking.</a:t>
             </a:r>
           </a:p>
         </p:txBody>
@@ -11967,7 +11972,7 @@
                 </a:solidFill>
                 <a:latin typeface="Arial"/>
               </a:rPr>
-              <a:t>SIGN 1  ·  8:00–13:00</a:t>
+              <a:t>SIGN 1</a:t>
             </a:r>
           </a:p>
         </p:txBody>
@@ -12492,7 +12497,7 @@
                 </a:solidFill>
                 <a:latin typeface="Arial"/>
               </a:rPr>
-              <a:t>SIGN 2  ·  13:00–18:00</a:t>
+              <a:t>SIGN 2</a:t>
             </a:r>
           </a:p>
         </p:txBody>
@@ -13017,7 +13022,7 @@
                 </a:solidFill>
                 <a:latin typeface="Arial"/>
               </a:rPr>
-              <a:t>SIGN 3  ·  18:00–23:00</a:t>
+              <a:t>SIGN 3</a:t>
             </a:r>
           </a:p>
         </p:txBody>
